--- a/effect-tests/style-candidate-editable-samples/samples/style-sample-minimal-premium.pptx
+++ b/effect-tests/style-candidate-editable-samples/samples/style-sample-minimal-premium.pptx
@@ -975,8 +975,8 @@
         </p:nvSpPr>
         <p:spPr>
           <a:xfrm>
-            <a:off x="658368" y="749808"/>
-            <a:ext cx="5486400" cy="777240"/>
+            <a:off x="658368" y="694944"/>
+            <a:ext cx="5623560" cy="777240"/>
           </a:xfrm>
           <a:prstGeom prst="rect">
             <a:avLst/>
@@ -1016,7 +1016,7 @@
         </p:nvSpPr>
         <p:spPr>
           <a:xfrm>
-            <a:off x="694944" y="1536192"/>
+            <a:off x="694944" y="1463040"/>
             <a:ext cx="4114800" cy="228600"/>
           </a:xfrm>
           <a:prstGeom prst="rect">
@@ -1057,21 +1057,17 @@
         </p:nvSpPr>
         <p:spPr>
           <a:xfrm>
-            <a:off x="685800" y="2029968"/>
-            <a:ext cx="5074920" cy="1874520"/>
-          </a:xfrm>
-          <a:prstGeom prst="roundRect">
-            <a:avLst>
-              <a:gd name="adj" fmla="val 3902"/>
-            </a:avLst>
-          </a:prstGeom>
-          <a:solidFill>
-            <a:srgbClr val="FFFFFF"/>
-          </a:solidFill>
+            <a:off x="713232" y="1938528"/>
+            <a:ext cx="4434840" cy="0"/>
+          </a:xfrm>
+          <a:prstGeom prst="line">
+            <a:avLst/>
+          </a:prstGeom>
+          <a:noFill/>
           <a:ln w="12700">
             <a:solidFill>
               <a:srgbClr val="050505">
-                <a:alpha val="70000"/>
+                <a:alpha val="45000"/>
               </a:srgbClr>
             </a:solidFill>
             <a:prstDash val="solid"/>
@@ -1080,13 +1076,38 @@
       </p:sp>
       <p:sp>
         <p:nvSpPr>
-          <p:cNvPr id="8" name="Text 5"/>
-          <p:cNvSpPr/>
-          <p:nvPr/>
-        </p:nvSpPr>
-        <p:spPr>
-          <a:xfrm>
-            <a:off x="932688" y="2267712"/>
+          <p:cNvPr id="8" name="Shape 5"/>
+          <p:cNvSpPr/>
+          <p:nvPr/>
+        </p:nvSpPr>
+        <p:spPr>
+          <a:xfrm>
+            <a:off x="6236208" y="1115568"/>
+            <a:ext cx="0" cy="4498848"/>
+          </a:xfrm>
+          <a:prstGeom prst="line">
+            <a:avLst/>
+          </a:prstGeom>
+          <a:noFill/>
+          <a:ln w="12700">
+            <a:solidFill>
+              <a:srgbClr val="A7A7A7">
+                <a:alpha val="55000"/>
+              </a:srgbClr>
+            </a:solidFill>
+            <a:prstDash val="solid"/>
+          </a:ln>
+        </p:spPr>
+      </p:sp>
+      <p:sp>
+        <p:nvSpPr>
+          <p:cNvPr id="9" name="Text 6"/>
+          <p:cNvSpPr/>
+          <p:nvPr/>
+        </p:nvSpPr>
+        <p:spPr>
+          <a:xfrm>
+            <a:off x="749808" y="2212848"/>
             <a:ext cx="1645920" cy="256032"/>
           </a:xfrm>
           <a:prstGeom prst="rect">
@@ -1105,7 +1126,7 @@
               <a:buNone/>
             </a:pPr>
             <a:r>
-              <a:rPr lang="en-US" sz="1300" b="1" dirty="0">
+              <a:rPr lang="en-US" sz="1400" b="1" dirty="0">
                 <a:solidFill>
                   <a:srgbClr val="050505"/>
                 </a:solidFill>
@@ -1115,20 +1136,20 @@
               </a:rPr>
               <a:t>核心结论</a:t>
             </a:r>
-            <a:endParaRPr lang="en-US" sz="1300" dirty="0"/>
-          </a:p>
-        </p:txBody>
-      </p:sp>
-      <p:sp>
-        <p:nvSpPr>
-          <p:cNvPr id="9" name="Text 6"/>
-          <p:cNvSpPr/>
-          <p:nvPr/>
-        </p:nvSpPr>
-        <p:spPr>
-          <a:xfrm>
-            <a:off x="932688" y="2670048"/>
-            <a:ext cx="4343400" cy="603504"/>
+            <a:endParaRPr lang="en-US" sz="1400" dirty="0"/>
+          </a:p>
+        </p:txBody>
+      </p:sp>
+      <p:sp>
+        <p:nvSpPr>
+          <p:cNvPr id="10" name="Text 7"/>
+          <p:cNvSpPr/>
+          <p:nvPr/>
+        </p:nvSpPr>
+        <p:spPr>
+          <a:xfrm>
+            <a:off x="749808" y="2688336"/>
+            <a:ext cx="4389120" cy="640080"/>
           </a:xfrm>
           <a:prstGeom prst="rect">
             <a:avLst/>
@@ -1146,7 +1167,7 @@
               <a:buNone/>
             </a:pPr>
             <a:r>
-              <a:rPr lang="en-US" sz="1120" dirty="0">
+              <a:rPr lang="en-US" sz="1110" dirty="0">
                 <a:solidFill>
                   <a:srgbClr val="5D6673"/>
                 </a:solidFill>
@@ -1156,20 +1177,20 @@
               </a:rPr>
               <a:t>AI 应用正在从工具采购转向流程重构，真正的价值来自业务场景、数据闭环和组织协同。</a:t>
             </a:r>
-            <a:endParaRPr lang="en-US" sz="1120" dirty="0"/>
-          </a:p>
-        </p:txBody>
-      </p:sp>
-      <p:sp>
-        <p:nvSpPr>
-          <p:cNvPr id="10" name="Shape 7"/>
-          <p:cNvSpPr/>
-          <p:nvPr/>
-        </p:nvSpPr>
-        <p:spPr>
-          <a:xfrm>
-            <a:off x="960120" y="3493008"/>
-            <a:ext cx="82296" cy="82296"/>
+            <a:endParaRPr lang="en-US" sz="1110" dirty="0"/>
+          </a:p>
+        </p:txBody>
+      </p:sp>
+      <p:sp>
+        <p:nvSpPr>
+          <p:cNvPr id="11" name="Shape 8"/>
+          <p:cNvSpPr/>
+          <p:nvPr/>
+        </p:nvSpPr>
+        <p:spPr>
+          <a:xfrm>
+            <a:off x="786384" y="3694176"/>
+            <a:ext cx="73152" cy="73152"/>
           </a:xfrm>
           <a:prstGeom prst="ellipse">
             <a:avLst/>
@@ -1189,14 +1210,14 @@
       </p:sp>
       <p:sp>
         <p:nvSpPr>
-          <p:cNvPr id="11" name="Text 8"/>
-          <p:cNvSpPr/>
-          <p:nvPr/>
-        </p:nvSpPr>
-        <p:spPr>
-          <a:xfrm>
-            <a:off x="1115568" y="3456432"/>
-            <a:ext cx="3474720" cy="146304"/>
+          <p:cNvPr id="12" name="Text 9"/>
+          <p:cNvSpPr/>
+          <p:nvPr/>
+        </p:nvSpPr>
+        <p:spPr>
+          <a:xfrm>
+            <a:off x="950976" y="3639312"/>
+            <a:ext cx="4114800" cy="164592"/>
           </a:xfrm>
           <a:prstGeom prst="rect">
             <a:avLst/>
@@ -1230,14 +1251,14 @@
       </p:sp>
       <p:sp>
         <p:nvSpPr>
-          <p:cNvPr id="12" name="Shape 9"/>
-          <p:cNvSpPr/>
-          <p:nvPr/>
-        </p:nvSpPr>
-        <p:spPr>
-          <a:xfrm>
-            <a:off x="960120" y="3749040"/>
-            <a:ext cx="82296" cy="82296"/>
+          <p:cNvPr id="13" name="Shape 10"/>
+          <p:cNvSpPr/>
+          <p:nvPr/>
+        </p:nvSpPr>
+        <p:spPr>
+          <a:xfrm>
+            <a:off x="786384" y="4005072"/>
+            <a:ext cx="73152" cy="73152"/>
           </a:xfrm>
           <a:prstGeom prst="ellipse">
             <a:avLst/>
@@ -1257,14 +1278,14 @@
       </p:sp>
       <p:sp>
         <p:nvSpPr>
-          <p:cNvPr id="13" name="Text 10"/>
-          <p:cNvSpPr/>
-          <p:nvPr/>
-        </p:nvSpPr>
-        <p:spPr>
-          <a:xfrm>
-            <a:off x="1115568" y="3712464"/>
-            <a:ext cx="3474720" cy="146304"/>
+          <p:cNvPr id="14" name="Text 11"/>
+          <p:cNvSpPr/>
+          <p:nvPr/>
+        </p:nvSpPr>
+        <p:spPr>
+          <a:xfrm>
+            <a:off x="950976" y="3950208"/>
+            <a:ext cx="4114800" cy="164592"/>
           </a:xfrm>
           <a:prstGeom prst="rect">
             <a:avLst/>
@@ -1298,14 +1319,14 @@
       </p:sp>
       <p:sp>
         <p:nvSpPr>
-          <p:cNvPr id="14" name="Shape 11"/>
-          <p:cNvSpPr/>
-          <p:nvPr/>
-        </p:nvSpPr>
-        <p:spPr>
-          <a:xfrm>
-            <a:off x="960120" y="4005072"/>
-            <a:ext cx="82296" cy="82296"/>
+          <p:cNvPr id="15" name="Shape 12"/>
+          <p:cNvSpPr/>
+          <p:nvPr/>
+        </p:nvSpPr>
+        <p:spPr>
+          <a:xfrm>
+            <a:off x="786384" y="4315968"/>
+            <a:ext cx="73152" cy="73152"/>
           </a:xfrm>
           <a:prstGeom prst="ellipse">
             <a:avLst/>
@@ -1325,14 +1346,14 @@
       </p:sp>
       <p:sp>
         <p:nvSpPr>
-          <p:cNvPr id="15" name="Text 12"/>
-          <p:cNvSpPr/>
-          <p:nvPr/>
-        </p:nvSpPr>
-        <p:spPr>
-          <a:xfrm>
-            <a:off x="1115568" y="3968496"/>
-            <a:ext cx="3474720" cy="146304"/>
+          <p:cNvPr id="16" name="Text 13"/>
+          <p:cNvSpPr/>
+          <p:nvPr/>
+        </p:nvSpPr>
+        <p:spPr>
+          <a:xfrm>
+            <a:off x="950976" y="4261104"/>
+            <a:ext cx="4114800" cy="164592"/>
           </a:xfrm>
           <a:prstGeom prst="rect">
             <a:avLst/>
@@ -1366,27 +1387,29 @@
       </p:sp>
       <p:sp>
         <p:nvSpPr>
-          <p:cNvPr id="16" name="Shape 13"/>
-          <p:cNvSpPr/>
-          <p:nvPr/>
-        </p:nvSpPr>
-        <p:spPr>
-          <a:xfrm>
-            <a:off x="713232" y="4315968"/>
-            <a:ext cx="1417320" cy="841248"/>
+          <p:cNvPr id="17" name="Shape 14"/>
+          <p:cNvSpPr/>
+          <p:nvPr/>
+        </p:nvSpPr>
+        <p:spPr>
+          <a:xfrm>
+            <a:off x="749808" y="4828032"/>
+            <a:ext cx="1234440" cy="658368"/>
           </a:xfrm>
           <a:prstGeom prst="roundRect">
             <a:avLst>
-              <a:gd name="adj" fmla="val 8696"/>
+              <a:gd name="adj" fmla="val 11111"/>
             </a:avLst>
           </a:prstGeom>
           <a:solidFill>
-            <a:srgbClr val="FFFFFF"/>
+            <a:srgbClr val="F5F5F2">
+              <a:alpha val="66000"/>
+            </a:srgbClr>
           </a:solidFill>
           <a:ln w="12700">
             <a:solidFill>
               <a:srgbClr val="050505">
-                <a:alpha val="90000"/>
+                <a:alpha val="52000"/>
               </a:srgbClr>
             </a:solidFill>
             <a:prstDash val="solid"/>
@@ -1395,14 +1418,14 @@
       </p:sp>
       <p:sp>
         <p:nvSpPr>
-          <p:cNvPr id="17" name="Text 14"/>
-          <p:cNvSpPr/>
-          <p:nvPr/>
-        </p:nvSpPr>
-        <p:spPr>
-          <a:xfrm>
-            <a:off x="877824" y="4480560"/>
-            <a:ext cx="1088136" cy="292608"/>
+          <p:cNvPr id="18" name="Text 15"/>
+          <p:cNvSpPr/>
+          <p:nvPr/>
+        </p:nvSpPr>
+        <p:spPr>
+          <a:xfrm>
+            <a:off x="877824" y="4919472"/>
+            <a:ext cx="978408" cy="302849"/>
           </a:xfrm>
           <a:prstGeom prst="rect">
             <a:avLst/>
@@ -1420,7 +1443,7 @@
               <a:buNone/>
             </a:pPr>
             <a:r>
-              <a:rPr lang="en-US" sz="2100" b="1" dirty="0">
+              <a:rPr lang="en-US" sz="1700" b="1" dirty="0">
                 <a:solidFill>
                   <a:srgbClr val="050505"/>
                 </a:solidFill>
@@ -1430,20 +1453,20 @@
               </a:rPr>
               <a:t>73%</a:t>
             </a:r>
-            <a:endParaRPr lang="en-US" sz="2100" dirty="0"/>
-          </a:p>
-        </p:txBody>
-      </p:sp>
-      <p:sp>
-        <p:nvSpPr>
-          <p:cNvPr id="18" name="Text 15"/>
-          <p:cNvSpPr/>
-          <p:nvPr/>
-        </p:nvSpPr>
-        <p:spPr>
-          <a:xfrm>
-            <a:off x="877824" y="4828032"/>
-            <a:ext cx="1088136" cy="256032"/>
+            <a:endParaRPr lang="en-US" sz="1700" dirty="0"/>
+          </a:p>
+        </p:txBody>
+      </p:sp>
+      <p:sp>
+        <p:nvSpPr>
+          <p:cNvPr id="19" name="Text 16"/>
+          <p:cNvSpPr/>
+          <p:nvPr/>
+        </p:nvSpPr>
+        <p:spPr>
+          <a:xfrm>
+            <a:off x="877824" y="5209885"/>
+            <a:ext cx="978408" cy="171176"/>
           </a:xfrm>
           <a:prstGeom prst="rect">
             <a:avLst/>
@@ -1461,7 +1484,7 @@
               <a:buNone/>
             </a:pPr>
             <a:r>
-              <a:rPr lang="en-US" sz="950" b="1" dirty="0">
+              <a:rPr lang="en-US" sz="760" b="1" dirty="0">
                 <a:solidFill>
                   <a:srgbClr val="050505"/>
                 </a:solidFill>
@@ -1471,33 +1494,35 @@
               </a:rPr>
               <a:t>企业已进入试点</a:t>
             </a:r>
-            <a:endParaRPr lang="en-US" sz="950" dirty="0"/>
-          </a:p>
-        </p:txBody>
-      </p:sp>
-      <p:sp>
-        <p:nvSpPr>
-          <p:cNvPr id="19" name="Shape 16"/>
-          <p:cNvSpPr/>
-          <p:nvPr/>
-        </p:nvSpPr>
-        <p:spPr>
-          <a:xfrm>
-            <a:off x="2395728" y="4315968"/>
-            <a:ext cx="1417320" cy="841248"/>
+            <a:endParaRPr lang="en-US" sz="760" dirty="0"/>
+          </a:p>
+        </p:txBody>
+      </p:sp>
+      <p:sp>
+        <p:nvSpPr>
+          <p:cNvPr id="20" name="Shape 17"/>
+          <p:cNvSpPr/>
+          <p:nvPr/>
+        </p:nvSpPr>
+        <p:spPr>
+          <a:xfrm>
+            <a:off x="2377440" y="4828032"/>
+            <a:ext cx="1234440" cy="658368"/>
           </a:xfrm>
           <a:prstGeom prst="roundRect">
             <a:avLst>
-              <a:gd name="adj" fmla="val 8696"/>
+              <a:gd name="adj" fmla="val 11111"/>
             </a:avLst>
           </a:prstGeom>
           <a:solidFill>
-            <a:srgbClr val="FFFFFF"/>
+            <a:srgbClr val="F5F5F2">
+              <a:alpha val="66000"/>
+            </a:srgbClr>
           </a:solidFill>
           <a:ln w="12700">
             <a:solidFill>
               <a:srgbClr val="4A4A4A">
-                <a:alpha val="90000"/>
+                <a:alpha val="52000"/>
               </a:srgbClr>
             </a:solidFill>
             <a:prstDash val="solid"/>
@@ -1506,14 +1531,14 @@
       </p:sp>
       <p:sp>
         <p:nvSpPr>
-          <p:cNvPr id="20" name="Text 17"/>
-          <p:cNvSpPr/>
-          <p:nvPr/>
-        </p:nvSpPr>
-        <p:spPr>
-          <a:xfrm>
-            <a:off x="2560320" y="4480560"/>
-            <a:ext cx="1088136" cy="292608"/>
+          <p:cNvPr id="21" name="Text 18"/>
+          <p:cNvSpPr/>
+          <p:nvPr/>
+        </p:nvSpPr>
+        <p:spPr>
+          <a:xfrm>
+            <a:off x="2505456" y="4919472"/>
+            <a:ext cx="978408" cy="302849"/>
           </a:xfrm>
           <a:prstGeom prst="rect">
             <a:avLst/>
@@ -1531,7 +1556,7 @@
               <a:buNone/>
             </a:pPr>
             <a:r>
-              <a:rPr lang="en-US" sz="2100" b="1" dirty="0">
+              <a:rPr lang="en-US" sz="1700" b="1" dirty="0">
                 <a:solidFill>
                   <a:srgbClr val="4A4A4A"/>
                 </a:solidFill>
@@ -1541,20 +1566,20 @@
               </a:rPr>
               <a:t>3x</a:t>
             </a:r>
-            <a:endParaRPr lang="en-US" sz="2100" dirty="0"/>
-          </a:p>
-        </p:txBody>
-      </p:sp>
-      <p:sp>
-        <p:nvSpPr>
-          <p:cNvPr id="21" name="Text 18"/>
-          <p:cNvSpPr/>
-          <p:nvPr/>
-        </p:nvSpPr>
-        <p:spPr>
-          <a:xfrm>
-            <a:off x="2560320" y="4828032"/>
-            <a:ext cx="1088136" cy="256032"/>
+            <a:endParaRPr lang="en-US" sz="1700" dirty="0"/>
+          </a:p>
+        </p:txBody>
+      </p:sp>
+      <p:sp>
+        <p:nvSpPr>
+          <p:cNvPr id="22" name="Text 19"/>
+          <p:cNvSpPr/>
+          <p:nvPr/>
+        </p:nvSpPr>
+        <p:spPr>
+          <a:xfrm>
+            <a:off x="2505456" y="5209885"/>
+            <a:ext cx="978408" cy="171176"/>
           </a:xfrm>
           <a:prstGeom prst="rect">
             <a:avLst/>
@@ -1572,7 +1597,7 @@
               <a:buNone/>
             </a:pPr>
             <a:r>
-              <a:rPr lang="en-US" sz="950" b="1" dirty="0">
+              <a:rPr lang="en-US" sz="760" b="1" dirty="0">
                 <a:solidFill>
                   <a:srgbClr val="050505"/>
                 </a:solidFill>
@@ -1582,33 +1607,35 @@
               </a:rPr>
               <a:t>高频任务提效</a:t>
             </a:r>
-            <a:endParaRPr lang="en-US" sz="950" dirty="0"/>
-          </a:p>
-        </p:txBody>
-      </p:sp>
-      <p:sp>
-        <p:nvSpPr>
-          <p:cNvPr id="22" name="Shape 19"/>
-          <p:cNvSpPr/>
-          <p:nvPr/>
-        </p:nvSpPr>
-        <p:spPr>
-          <a:xfrm>
-            <a:off x="4078224" y="4315968"/>
-            <a:ext cx="1417320" cy="841248"/>
+            <a:endParaRPr lang="en-US" sz="760" dirty="0"/>
+          </a:p>
+        </p:txBody>
+      </p:sp>
+      <p:sp>
+        <p:nvSpPr>
+          <p:cNvPr id="23" name="Shape 20"/>
+          <p:cNvSpPr/>
+          <p:nvPr/>
+        </p:nvSpPr>
+        <p:spPr>
+          <a:xfrm>
+            <a:off x="4005072" y="4828032"/>
+            <a:ext cx="1234440" cy="658368"/>
           </a:xfrm>
           <a:prstGeom prst="roundRect">
             <a:avLst>
-              <a:gd name="adj" fmla="val 8696"/>
+              <a:gd name="adj" fmla="val 11111"/>
             </a:avLst>
           </a:prstGeom>
           <a:solidFill>
-            <a:srgbClr val="FFFFFF"/>
+            <a:srgbClr val="F5F5F2">
+              <a:alpha val="66000"/>
+            </a:srgbClr>
           </a:solidFill>
           <a:ln w="12700">
             <a:solidFill>
               <a:srgbClr val="050505">
-                <a:alpha val="90000"/>
+                <a:alpha val="52000"/>
               </a:srgbClr>
             </a:solidFill>
             <a:prstDash val="solid"/>
@@ -1617,14 +1644,14 @@
       </p:sp>
       <p:sp>
         <p:nvSpPr>
-          <p:cNvPr id="23" name="Text 20"/>
-          <p:cNvSpPr/>
-          <p:nvPr/>
-        </p:nvSpPr>
-        <p:spPr>
-          <a:xfrm>
-            <a:off x="4242816" y="4480560"/>
-            <a:ext cx="1088136" cy="292608"/>
+          <p:cNvPr id="24" name="Text 21"/>
+          <p:cNvSpPr/>
+          <p:nvPr/>
+        </p:nvSpPr>
+        <p:spPr>
+          <a:xfrm>
+            <a:off x="4133088" y="4919472"/>
+            <a:ext cx="978408" cy="302849"/>
           </a:xfrm>
           <a:prstGeom prst="rect">
             <a:avLst/>
@@ -1642,7 +1669,7 @@
               <a:buNone/>
             </a:pPr>
             <a:r>
-              <a:rPr lang="en-US" sz="2100" b="1" dirty="0">
+              <a:rPr lang="en-US" sz="1700" b="1" dirty="0">
                 <a:solidFill>
                   <a:srgbClr val="050505"/>
                 </a:solidFill>
@@ -1652,20 +1679,20 @@
               </a:rPr>
               <a:t>2026</a:t>
             </a:r>
-            <a:endParaRPr lang="en-US" sz="2100" dirty="0"/>
-          </a:p>
-        </p:txBody>
-      </p:sp>
-      <p:sp>
-        <p:nvSpPr>
-          <p:cNvPr id="24" name="Text 21"/>
-          <p:cNvSpPr/>
-          <p:nvPr/>
-        </p:nvSpPr>
-        <p:spPr>
-          <a:xfrm>
-            <a:off x="4242816" y="4828032"/>
-            <a:ext cx="1088136" cy="256032"/>
+            <a:endParaRPr lang="en-US" sz="1700" dirty="0"/>
+          </a:p>
+        </p:txBody>
+      </p:sp>
+      <p:sp>
+        <p:nvSpPr>
+          <p:cNvPr id="25" name="Text 22"/>
+          <p:cNvSpPr/>
+          <p:nvPr/>
+        </p:nvSpPr>
+        <p:spPr>
+          <a:xfrm>
+            <a:off x="4133088" y="5209885"/>
+            <a:ext cx="978408" cy="171176"/>
           </a:xfrm>
           <a:prstGeom prst="rect">
             <a:avLst/>
@@ -1683,7 +1710,7 @@
               <a:buNone/>
             </a:pPr>
             <a:r>
-              <a:rPr lang="en-US" sz="950" b="1" dirty="0">
+              <a:rPr lang="en-US" sz="760" b="1" dirty="0">
                 <a:solidFill>
                   <a:srgbClr val="050505"/>
                 </a:solidFill>
@@ -1693,38 +1720,9 @@
               </a:rPr>
               <a:t>规模化落地窗口</a:t>
             </a:r>
-            <a:endParaRPr lang="en-US" sz="950" dirty="0"/>
-          </a:p>
-        </p:txBody>
-      </p:sp>
-      <p:sp>
-        <p:nvSpPr>
-          <p:cNvPr id="25" name="Shape 22"/>
-          <p:cNvSpPr/>
-          <p:nvPr/>
-        </p:nvSpPr>
-        <p:spPr>
-          <a:xfrm>
-            <a:off x="6720840" y="1051560"/>
-            <a:ext cx="4389120" cy="4251960"/>
-          </a:xfrm>
-          <a:prstGeom prst="roundRect">
-            <a:avLst>
-              <a:gd name="adj" fmla="val 1720"/>
-            </a:avLst>
-          </a:prstGeom>
-          <a:solidFill>
-            <a:srgbClr val="FFFFFF"/>
-          </a:solidFill>
-          <a:ln w="12700">
-            <a:solidFill>
-              <a:srgbClr val="4A4A4A">
-                <a:alpha val="66000"/>
-              </a:srgbClr>
-            </a:solidFill>
-            <a:prstDash val="solid"/>
-          </a:ln>
-        </p:spPr>
+            <a:endParaRPr lang="en-US" sz="760" dirty="0"/>
+          </a:p>
+        </p:txBody>
       </p:sp>
       <p:sp>
         <p:nvSpPr>
@@ -1734,8 +1732,8 @@
         </p:nvSpPr>
         <p:spPr>
           <a:xfrm>
-            <a:off x="7059168" y="1335024"/>
-            <a:ext cx="2011680" cy="237744"/>
+            <a:off x="6784848" y="1243584"/>
+            <a:ext cx="1920240" cy="237744"/>
           </a:xfrm>
           <a:prstGeom prst="rect">
             <a:avLst/>
@@ -1775,8 +1773,58 @@
         </p:nvSpPr>
         <p:spPr>
           <a:xfrm>
-            <a:off x="7260336" y="3055193"/>
-            <a:ext cx="628650" cy="821863"/>
+            <a:off x="6784848" y="1682496"/>
+            <a:ext cx="3456432" cy="0"/>
+          </a:xfrm>
+          <a:prstGeom prst="line">
+            <a:avLst/>
+          </a:prstGeom>
+          <a:noFill/>
+          <a:ln w="12700">
+            <a:solidFill>
+              <a:srgbClr val="050505">
+                <a:alpha val="45000"/>
+              </a:srgbClr>
+            </a:solidFill>
+            <a:prstDash val="solid"/>
+          </a:ln>
+        </p:spPr>
+      </p:sp>
+      <p:sp>
+        <p:nvSpPr>
+          <p:cNvPr id="28" name="Shape 25"/>
+          <p:cNvSpPr/>
+          <p:nvPr/>
+        </p:nvSpPr>
+        <p:spPr>
+          <a:xfrm>
+            <a:off x="6720840" y="4032504"/>
+            <a:ext cx="3703320" cy="0"/>
+          </a:xfrm>
+          <a:prstGeom prst="line">
+            <a:avLst/>
+          </a:prstGeom>
+          <a:noFill/>
+          <a:ln w="12700">
+            <a:solidFill>
+              <a:srgbClr val="A7A7A7">
+                <a:alpha val="70000"/>
+              </a:srgbClr>
+            </a:solidFill>
+            <a:prstDash val="solid"/>
+          </a:ln>
+        </p:spPr>
+      </p:sp>
+      <p:sp>
+        <p:nvSpPr>
+          <p:cNvPr id="29" name="Shape 26"/>
+          <p:cNvSpPr/>
+          <p:nvPr/>
+        </p:nvSpPr>
+        <p:spPr>
+          <a:xfrm>
+            <a:off x="6922008" y="3153034"/>
+            <a:ext cx="674370" cy="879470"/>
           </a:xfrm>
           <a:prstGeom prst="rect">
             <a:avLst/>
@@ -1796,14 +1844,14 @@
       </p:sp>
       <p:sp>
         <p:nvSpPr>
-          <p:cNvPr id="28" name="Text 25"/>
-          <p:cNvSpPr/>
-          <p:nvPr/>
-        </p:nvSpPr>
-        <p:spPr>
-          <a:xfrm>
-            <a:off x="7223760" y="4005072"/>
-            <a:ext cx="701802" cy="164592"/>
+          <p:cNvPr id="30" name="Text 27"/>
+          <p:cNvSpPr/>
+          <p:nvPr/>
+        </p:nvSpPr>
+        <p:spPr>
+          <a:xfrm>
+            <a:off x="6885432" y="4160520"/>
+            <a:ext cx="747522" cy="164592"/>
           </a:xfrm>
           <a:prstGeom prst="rect">
             <a:avLst/>
@@ -1837,14 +1885,14 @@
       </p:sp>
       <p:sp>
         <p:nvSpPr>
-          <p:cNvPr id="29" name="Shape 26"/>
-          <p:cNvSpPr/>
-          <p:nvPr/>
-        </p:nvSpPr>
-        <p:spPr>
-          <a:xfrm>
-            <a:off x="8090154" y="2624694"/>
-            <a:ext cx="628650" cy="1252362"/>
+          <p:cNvPr id="31" name="Shape 28"/>
+          <p:cNvSpPr/>
+          <p:nvPr/>
+        </p:nvSpPr>
+        <p:spPr>
+          <a:xfrm>
+            <a:off x="7797546" y="2692359"/>
+            <a:ext cx="674370" cy="1340145"/>
           </a:xfrm>
           <a:prstGeom prst="rect">
             <a:avLst/>
@@ -1864,14 +1912,14 @@
       </p:sp>
       <p:sp>
         <p:nvSpPr>
-          <p:cNvPr id="30" name="Text 27"/>
-          <p:cNvSpPr/>
-          <p:nvPr/>
-        </p:nvSpPr>
-        <p:spPr>
-          <a:xfrm>
-            <a:off x="8053578" y="4005072"/>
-            <a:ext cx="701802" cy="164592"/>
+          <p:cNvPr id="32" name="Text 29"/>
+          <p:cNvSpPr/>
+          <p:nvPr/>
+        </p:nvSpPr>
+        <p:spPr>
+          <a:xfrm>
+            <a:off x="7760970" y="4160520"/>
+            <a:ext cx="747522" cy="164592"/>
           </a:xfrm>
           <a:prstGeom prst="rect">
             <a:avLst/>
@@ -1905,14 +1953,14 @@
       </p:sp>
       <p:sp>
         <p:nvSpPr>
-          <p:cNvPr id="31" name="Shape 28"/>
-          <p:cNvSpPr/>
-          <p:nvPr/>
-        </p:nvSpPr>
-        <p:spPr>
-          <a:xfrm>
-            <a:off x="8919972" y="2350740"/>
-            <a:ext cx="628650" cy="1526316"/>
+          <p:cNvPr id="33" name="Shape 30"/>
+          <p:cNvSpPr/>
+          <p:nvPr/>
+        </p:nvSpPr>
+        <p:spPr>
+          <a:xfrm>
+            <a:off x="8673084" y="2399203"/>
+            <a:ext cx="674370" cy="1633301"/>
           </a:xfrm>
           <a:prstGeom prst="rect">
             <a:avLst/>
@@ -1932,14 +1980,14 @@
       </p:sp>
       <p:sp>
         <p:nvSpPr>
-          <p:cNvPr id="32" name="Text 29"/>
-          <p:cNvSpPr/>
-          <p:nvPr/>
-        </p:nvSpPr>
-        <p:spPr>
-          <a:xfrm>
-            <a:off x="8883396" y="4005072"/>
-            <a:ext cx="701802" cy="164592"/>
+          <p:cNvPr id="34" name="Text 31"/>
+          <p:cNvSpPr/>
+          <p:nvPr/>
+        </p:nvSpPr>
+        <p:spPr>
+          <a:xfrm>
+            <a:off x="8636508" y="4160520"/>
+            <a:ext cx="747522" cy="164592"/>
           </a:xfrm>
           <a:prstGeom prst="rect">
             <a:avLst/>
@@ -1973,14 +2021,14 @@
       </p:sp>
       <p:sp>
         <p:nvSpPr>
-          <p:cNvPr id="33" name="Shape 30"/>
-          <p:cNvSpPr/>
-          <p:nvPr/>
-        </p:nvSpPr>
-        <p:spPr>
-          <a:xfrm>
-            <a:off x="9749790" y="2096353"/>
-            <a:ext cx="628650" cy="1780703"/>
+          <p:cNvPr id="35" name="Shape 32"/>
+          <p:cNvSpPr/>
+          <p:nvPr/>
+        </p:nvSpPr>
+        <p:spPr>
+          <a:xfrm>
+            <a:off x="9548622" y="2126986"/>
+            <a:ext cx="674370" cy="1905518"/>
           </a:xfrm>
           <a:prstGeom prst="rect">
             <a:avLst/>
@@ -2000,14 +2048,14 @@
       </p:sp>
       <p:sp>
         <p:nvSpPr>
-          <p:cNvPr id="34" name="Text 31"/>
-          <p:cNvSpPr/>
-          <p:nvPr/>
-        </p:nvSpPr>
-        <p:spPr>
-          <a:xfrm>
-            <a:off x="9713214" y="4005072"/>
-            <a:ext cx="701802" cy="164592"/>
+          <p:cNvPr id="36" name="Text 33"/>
+          <p:cNvSpPr/>
+          <p:nvPr/>
+        </p:nvSpPr>
+        <p:spPr>
+          <a:xfrm>
+            <a:off x="9512046" y="4160520"/>
+            <a:ext cx="747522" cy="164592"/>
           </a:xfrm>
           <a:prstGeom prst="rect">
             <a:avLst/>
@@ -2041,14 +2089,39 @@
       </p:sp>
       <p:sp>
         <p:nvSpPr>
-          <p:cNvPr id="35" name="Text 32"/>
-          <p:cNvSpPr/>
-          <p:nvPr/>
-        </p:nvSpPr>
-        <p:spPr>
-          <a:xfrm>
-            <a:off x="7059168" y="4681728"/>
-            <a:ext cx="3520440" cy="256032"/>
+          <p:cNvPr id="37" name="Shape 34"/>
+          <p:cNvSpPr/>
+          <p:nvPr/>
+        </p:nvSpPr>
+        <p:spPr>
+          <a:xfrm>
+            <a:off x="6784848" y="4901184"/>
+            <a:ext cx="475488" cy="0"/>
+          </a:xfrm>
+          <a:prstGeom prst="line">
+            <a:avLst/>
+          </a:prstGeom>
+          <a:noFill/>
+          <a:ln w="19050">
+            <a:solidFill>
+              <a:srgbClr val="050505">
+                <a:alpha val="90000"/>
+              </a:srgbClr>
+            </a:solidFill>
+            <a:prstDash val="solid"/>
+          </a:ln>
+        </p:spPr>
+      </p:sp>
+      <p:sp>
+        <p:nvSpPr>
+          <p:cNvPr id="38" name="Text 35"/>
+          <p:cNvSpPr/>
+          <p:nvPr/>
+        </p:nvSpPr>
+        <p:spPr>
+          <a:xfrm>
+            <a:off x="7406640" y="4809744"/>
+            <a:ext cx="3474720" cy="164592"/>
           </a:xfrm>
           <a:prstGeom prst="rect">
             <a:avLst/>
@@ -2066,7 +2139,7 @@
               <a:buNone/>
             </a:pPr>
             <a:r>
-              <a:rPr lang="en-US" sz="840" dirty="0">
+              <a:rPr lang="en-US" sz="740" dirty="0">
                 <a:solidFill>
                   <a:srgbClr val="5D6673"/>
                 </a:solidFill>
@@ -2074,15 +2147,15 @@
                 <a:ea typeface="PingFang SC" pitchFamily="34" charset="-122"/>
                 <a:cs typeface="PingFang SC" pitchFamily="34" charset="-120"/>
               </a:rPr>
-              <a:t>样张中的文字、数字和图表标签均为 PPT 可编辑对象</a:t>
-            </a:r>
-            <a:endParaRPr lang="en-US" sz="840" dirty="0"/>
-          </a:p>
-        </p:txBody>
-      </p:sp>
-      <p:sp>
-        <p:nvSpPr>
-          <p:cNvPr id="36" name="Text 33"/>
+              <a:t>文字、数字和图表标签均为 PPT 可编辑对象</a:t>
+            </a:r>
+            <a:endParaRPr lang="en-US" sz="740" dirty="0"/>
+          </a:p>
+        </p:txBody>
+      </p:sp>
+      <p:sp>
+        <p:nvSpPr>
+          <p:cNvPr id="39" name="Text 36"/>
           <p:cNvSpPr/>
           <p:nvPr/>
         </p:nvSpPr>
@@ -2107,7 +2180,7 @@
               <a:buNone/>
             </a:pPr>
             <a:r>
-              <a:rPr lang="en-US" sz="750" b="1" dirty="0">
+              <a:rPr lang="en-US" sz="720" b="1" dirty="0">
                 <a:solidFill>
                   <a:srgbClr val="050505"/>
                 </a:solidFill>
@@ -2117,7 +2190,7 @@
               </a:rPr>
               <a:t>简约高级</a:t>
             </a:r>
-            <a:endParaRPr lang="en-US" sz="750" dirty="0"/>
+            <a:endParaRPr lang="en-US" sz="720" dirty="0"/>
           </a:p>
         </p:txBody>
       </p:sp>

--- a/effect-tests/style-candidate-editable-samples/samples/style-sample-minimal-premium.pptx
+++ b/effect-tests/style-candidate-editable-samples/samples/style-sample-minimal-premium.pptx
@@ -1057,17 +1057,17 @@
         </p:nvSpPr>
         <p:spPr>
           <a:xfrm>
-            <a:off x="713232" y="1938528"/>
-            <a:ext cx="4434840" cy="0"/>
+            <a:off x="749808" y="1938528"/>
+            <a:ext cx="4251960" cy="0"/>
           </a:xfrm>
           <a:prstGeom prst="line">
             <a:avLst/>
           </a:prstGeom>
           <a:noFill/>
-          <a:ln w="12700">
+          <a:ln w="15240">
             <a:solidFill>
               <a:srgbClr val="050505">
-                <a:alpha val="45000"/>
+                <a:alpha val="65000"/>
               </a:srgbClr>
             </a:solidFill>
             <a:prstDash val="solid"/>
@@ -1107,7 +1107,7 @@
         </p:nvSpPr>
         <p:spPr>
           <a:xfrm>
-            <a:off x="749808" y="2212848"/>
+            <a:off x="749808" y="2121408"/>
             <a:ext cx="1645920" cy="256032"/>
           </a:xfrm>
           <a:prstGeom prst="rect">
@@ -1126,7 +1126,7 @@
               <a:buNone/>
             </a:pPr>
             <a:r>
-              <a:rPr lang="en-US" sz="1400" b="1" dirty="0">
+              <a:rPr lang="en-US" sz="1300" b="1" dirty="0">
                 <a:solidFill>
                   <a:srgbClr val="050505"/>
                 </a:solidFill>
@@ -1136,7 +1136,7 @@
               </a:rPr>
               <a:t>核心结论</a:t>
             </a:r>
-            <a:endParaRPr lang="en-US" sz="1400" dirty="0"/>
+            <a:endParaRPr lang="en-US" sz="1300" dirty="0"/>
           </a:p>
         </p:txBody>
       </p:sp>
@@ -1148,8 +1148,8 @@
         </p:nvSpPr>
         <p:spPr>
           <a:xfrm>
-            <a:off x="749808" y="2688336"/>
-            <a:ext cx="4389120" cy="640080"/>
+            <a:off x="749808" y="2624328"/>
+            <a:ext cx="4343400" cy="603504"/>
           </a:xfrm>
           <a:prstGeom prst="rect">
             <a:avLst/>
@@ -1167,7 +1167,7 @@
               <a:buNone/>
             </a:pPr>
             <a:r>
-              <a:rPr lang="en-US" sz="1110" dirty="0">
+              <a:rPr lang="en-US" sz="1120" dirty="0">
                 <a:solidFill>
                   <a:srgbClr val="5D6673"/>
                 </a:solidFill>
@@ -1177,7 +1177,7 @@
               </a:rPr>
               <a:t>AI 应用正在从工具采购转向流程重构，真正的价值来自业务场景、数据闭环和组织协同。</a:t>
             </a:r>
-            <a:endParaRPr lang="en-US" sz="1110" dirty="0"/>
+            <a:endParaRPr lang="en-US" sz="1120" dirty="0"/>
           </a:p>
         </p:txBody>
       </p:sp>
@@ -1189,7 +1189,7 @@
         </p:nvSpPr>
         <p:spPr>
           <a:xfrm>
-            <a:off x="786384" y="3694176"/>
+            <a:off x="768096" y="3438144"/>
             <a:ext cx="73152" cy="73152"/>
           </a:xfrm>
           <a:prstGeom prst="ellipse">
@@ -1216,8 +1216,8 @@
         </p:nvSpPr>
         <p:spPr>
           <a:xfrm>
-            <a:off x="950976" y="3639312"/>
-            <a:ext cx="4114800" cy="164592"/>
+            <a:off x="932688" y="3383280"/>
+            <a:ext cx="3474720" cy="164592"/>
           </a:xfrm>
           <a:prstGeom prst="rect">
             <a:avLst/>
@@ -1257,7 +1257,7 @@
         </p:nvSpPr>
         <p:spPr>
           <a:xfrm>
-            <a:off x="786384" y="4005072"/>
+            <a:off x="768096" y="3730752"/>
             <a:ext cx="73152" cy="73152"/>
           </a:xfrm>
           <a:prstGeom prst="ellipse">
@@ -1284,8 +1284,8 @@
         </p:nvSpPr>
         <p:spPr>
           <a:xfrm>
-            <a:off x="950976" y="3950208"/>
-            <a:ext cx="4114800" cy="164592"/>
+            <a:off x="932688" y="3675888"/>
+            <a:ext cx="3474720" cy="164592"/>
           </a:xfrm>
           <a:prstGeom prst="rect">
             <a:avLst/>
@@ -1325,7 +1325,7 @@
         </p:nvSpPr>
         <p:spPr>
           <a:xfrm>
-            <a:off x="786384" y="4315968"/>
+            <a:off x="768096" y="4023360"/>
             <a:ext cx="73152" cy="73152"/>
           </a:xfrm>
           <a:prstGeom prst="ellipse">
@@ -1352,8 +1352,8 @@
         </p:nvSpPr>
         <p:spPr>
           <a:xfrm>
-            <a:off x="950976" y="4261104"/>
-            <a:ext cx="4114800" cy="164592"/>
+            <a:off x="932688" y="3968496"/>
+            <a:ext cx="3474720" cy="164592"/>
           </a:xfrm>
           <a:prstGeom prst="rect">
             <a:avLst/>
@@ -1393,23 +1393,23 @@
         </p:nvSpPr>
         <p:spPr>
           <a:xfrm>
-            <a:off x="749808" y="4828032"/>
-            <a:ext cx="1234440" cy="658368"/>
+            <a:off x="713232" y="4736592"/>
+            <a:ext cx="1353312" cy="621792"/>
           </a:xfrm>
           <a:prstGeom prst="roundRect">
             <a:avLst>
-              <a:gd name="adj" fmla="val 11111"/>
+              <a:gd name="adj" fmla="val 11765"/>
             </a:avLst>
           </a:prstGeom>
           <a:solidFill>
-            <a:srgbClr val="F5F5F2">
+            <a:srgbClr val="FFFFFF">
               <a:alpha val="66000"/>
             </a:srgbClr>
           </a:solidFill>
           <a:ln w="12700">
             <a:solidFill>
               <a:srgbClr val="050505">
-                <a:alpha val="52000"/>
+                <a:alpha val="64000"/>
               </a:srgbClr>
             </a:solidFill>
             <a:prstDash val="solid"/>
@@ -1424,8 +1424,8 @@
         </p:nvSpPr>
         <p:spPr>
           <a:xfrm>
-            <a:off x="877824" y="4919472"/>
-            <a:ext cx="978408" cy="302849"/>
+            <a:off x="841248" y="4828032"/>
+            <a:ext cx="1097280" cy="286024"/>
           </a:xfrm>
           <a:prstGeom prst="rect">
             <a:avLst/>
@@ -1443,7 +1443,7 @@
               <a:buNone/>
             </a:pPr>
             <a:r>
-              <a:rPr lang="en-US" sz="1700" b="1" dirty="0">
+              <a:rPr lang="en-US" sz="1800" b="1" dirty="0">
                 <a:solidFill>
                   <a:srgbClr val="050505"/>
                 </a:solidFill>
@@ -1453,7 +1453,7 @@
               </a:rPr>
               <a:t>73%</a:t>
             </a:r>
-            <a:endParaRPr lang="en-US" sz="1700" dirty="0"/>
+            <a:endParaRPr lang="en-US" sz="1800" dirty="0"/>
           </a:p>
         </p:txBody>
       </p:sp>
@@ -1465,8 +1465,8 @@
         </p:nvSpPr>
         <p:spPr>
           <a:xfrm>
-            <a:off x="877824" y="5209885"/>
-            <a:ext cx="978408" cy="171176"/>
+            <a:off x="841248" y="5097231"/>
+            <a:ext cx="1097280" cy="161666"/>
           </a:xfrm>
           <a:prstGeom prst="rect">
             <a:avLst/>
@@ -1506,23 +1506,23 @@
         </p:nvSpPr>
         <p:spPr>
           <a:xfrm>
-            <a:off x="2377440" y="4828032"/>
-            <a:ext cx="1234440" cy="658368"/>
+            <a:off x="2395728" y="4736592"/>
+            <a:ext cx="1353312" cy="621792"/>
           </a:xfrm>
           <a:prstGeom prst="roundRect">
             <a:avLst>
-              <a:gd name="adj" fmla="val 11111"/>
+              <a:gd name="adj" fmla="val 11765"/>
             </a:avLst>
           </a:prstGeom>
           <a:solidFill>
-            <a:srgbClr val="F5F5F2">
+            <a:srgbClr val="FFFFFF">
               <a:alpha val="66000"/>
             </a:srgbClr>
           </a:solidFill>
           <a:ln w="12700">
             <a:solidFill>
               <a:srgbClr val="4A4A4A">
-                <a:alpha val="52000"/>
+                <a:alpha val="64000"/>
               </a:srgbClr>
             </a:solidFill>
             <a:prstDash val="solid"/>
@@ -1537,8 +1537,8 @@
         </p:nvSpPr>
         <p:spPr>
           <a:xfrm>
-            <a:off x="2505456" y="4919472"/>
-            <a:ext cx="978408" cy="302849"/>
+            <a:off x="2523744" y="4828032"/>
+            <a:ext cx="1097280" cy="286024"/>
           </a:xfrm>
           <a:prstGeom prst="rect">
             <a:avLst/>
@@ -1556,7 +1556,7 @@
               <a:buNone/>
             </a:pPr>
             <a:r>
-              <a:rPr lang="en-US" sz="1700" b="1" dirty="0">
+              <a:rPr lang="en-US" sz="1800" b="1" dirty="0">
                 <a:solidFill>
                   <a:srgbClr val="4A4A4A"/>
                 </a:solidFill>
@@ -1566,7 +1566,7 @@
               </a:rPr>
               <a:t>3x</a:t>
             </a:r>
-            <a:endParaRPr lang="en-US" sz="1700" dirty="0"/>
+            <a:endParaRPr lang="en-US" sz="1800" dirty="0"/>
           </a:p>
         </p:txBody>
       </p:sp>
@@ -1578,8 +1578,8 @@
         </p:nvSpPr>
         <p:spPr>
           <a:xfrm>
-            <a:off x="2505456" y="5209885"/>
-            <a:ext cx="978408" cy="171176"/>
+            <a:off x="2523744" y="5097231"/>
+            <a:ext cx="1097280" cy="161666"/>
           </a:xfrm>
           <a:prstGeom prst="rect">
             <a:avLst/>
@@ -1619,23 +1619,23 @@
         </p:nvSpPr>
         <p:spPr>
           <a:xfrm>
-            <a:off x="4005072" y="4828032"/>
-            <a:ext cx="1234440" cy="658368"/>
+            <a:off x="4078224" y="4736592"/>
+            <a:ext cx="1353312" cy="621792"/>
           </a:xfrm>
           <a:prstGeom prst="roundRect">
             <a:avLst>
-              <a:gd name="adj" fmla="val 11111"/>
+              <a:gd name="adj" fmla="val 11765"/>
             </a:avLst>
           </a:prstGeom>
           <a:solidFill>
-            <a:srgbClr val="F5F5F2">
+            <a:srgbClr val="FFFFFF">
               <a:alpha val="66000"/>
             </a:srgbClr>
           </a:solidFill>
           <a:ln w="12700">
             <a:solidFill>
               <a:srgbClr val="050505">
-                <a:alpha val="52000"/>
+                <a:alpha val="64000"/>
               </a:srgbClr>
             </a:solidFill>
             <a:prstDash val="solid"/>
@@ -1650,8 +1650,8 @@
         </p:nvSpPr>
         <p:spPr>
           <a:xfrm>
-            <a:off x="4133088" y="4919472"/>
-            <a:ext cx="978408" cy="302849"/>
+            <a:off x="4206240" y="4828032"/>
+            <a:ext cx="1097280" cy="286024"/>
           </a:xfrm>
           <a:prstGeom prst="rect">
             <a:avLst/>
@@ -1669,7 +1669,7 @@
               <a:buNone/>
             </a:pPr>
             <a:r>
-              <a:rPr lang="en-US" sz="1700" b="1" dirty="0">
+              <a:rPr lang="en-US" sz="1800" b="1" dirty="0">
                 <a:solidFill>
                   <a:srgbClr val="050505"/>
                 </a:solidFill>
@@ -1679,7 +1679,7 @@
               </a:rPr>
               <a:t>2026</a:t>
             </a:r>
-            <a:endParaRPr lang="en-US" sz="1700" dirty="0"/>
+            <a:endParaRPr lang="en-US" sz="1800" dirty="0"/>
           </a:p>
         </p:txBody>
       </p:sp>
@@ -1691,8 +1691,8 @@
         </p:nvSpPr>
         <p:spPr>
           <a:xfrm>
-            <a:off x="4133088" y="5209885"/>
-            <a:ext cx="978408" cy="171176"/>
+            <a:off x="4206240" y="5097231"/>
+            <a:ext cx="1097280" cy="161666"/>
           </a:xfrm>
           <a:prstGeom prst="rect">
             <a:avLst/>
@@ -1732,8 +1732,8 @@
         </p:nvSpPr>
         <p:spPr>
           <a:xfrm>
-            <a:off x="6784848" y="1243584"/>
-            <a:ext cx="1920240" cy="237744"/>
+            <a:off x="6720840" y="1335024"/>
+            <a:ext cx="2011680" cy="237744"/>
           </a:xfrm>
           <a:prstGeom prst="rect">
             <a:avLst/>
@@ -1773,17 +1773,17 @@
         </p:nvSpPr>
         <p:spPr>
           <a:xfrm>
-            <a:off x="6784848" y="1682496"/>
-            <a:ext cx="3456432" cy="0"/>
+            <a:off x="6720840" y="1719072"/>
+            <a:ext cx="3730752" cy="0"/>
           </a:xfrm>
           <a:prstGeom prst="line">
             <a:avLst/>
           </a:prstGeom>
           <a:noFill/>
-          <a:ln w="12700">
+          <a:ln w="15240">
             <a:solidFill>
               <a:srgbClr val="050505">
-                <a:alpha val="45000"/>
+                <a:alpha val="65000"/>
               </a:srgbClr>
             </a:solidFill>
             <a:prstDash val="solid"/>
@@ -1798,8 +1798,8 @@
         </p:nvSpPr>
         <p:spPr>
           <a:xfrm>
-            <a:off x="6720840" y="4032504"/>
-            <a:ext cx="3703320" cy="0"/>
+            <a:off x="6647688" y="4151376"/>
+            <a:ext cx="3730752" cy="0"/>
           </a:xfrm>
           <a:prstGeom prst="line">
             <a:avLst/>
@@ -1823,8 +1823,8 @@
         </p:nvSpPr>
         <p:spPr>
           <a:xfrm>
-            <a:off x="6922008" y="3153034"/>
-            <a:ext cx="674370" cy="879470"/>
+            <a:off x="6848856" y="3283428"/>
+            <a:ext cx="681228" cy="867948"/>
           </a:xfrm>
           <a:prstGeom prst="rect">
             <a:avLst/>
@@ -1850,8 +1850,8 @@
         </p:nvSpPr>
         <p:spPr>
           <a:xfrm>
-            <a:off x="6885432" y="4160520"/>
-            <a:ext cx="747522" cy="164592"/>
+            <a:off x="6812280" y="4279392"/>
+            <a:ext cx="754380" cy="164592"/>
           </a:xfrm>
           <a:prstGeom prst="rect">
             <a:avLst/>
@@ -1891,8 +1891,8 @@
         </p:nvSpPr>
         <p:spPr>
           <a:xfrm>
-            <a:off x="7797546" y="2692359"/>
-            <a:ext cx="674370" cy="1340145"/>
+            <a:off x="7731252" y="2828788"/>
+            <a:ext cx="681228" cy="1322588"/>
           </a:xfrm>
           <a:prstGeom prst="rect">
             <a:avLst/>
@@ -1918,8 +1918,8 @@
         </p:nvSpPr>
         <p:spPr>
           <a:xfrm>
-            <a:off x="7760970" y="4160520"/>
-            <a:ext cx="747522" cy="164592"/>
+            <a:off x="7694676" y="4279392"/>
+            <a:ext cx="754380" cy="164592"/>
           </a:xfrm>
           <a:prstGeom prst="rect">
             <a:avLst/>
@@ -1959,8 +1959,8 @@
         </p:nvSpPr>
         <p:spPr>
           <a:xfrm>
-            <a:off x="8673084" y="2399203"/>
-            <a:ext cx="674370" cy="1633301"/>
+            <a:off x="8613648" y="2539472"/>
+            <a:ext cx="681228" cy="1611904"/>
           </a:xfrm>
           <a:prstGeom prst="rect">
             <a:avLst/>
@@ -1986,8 +1986,8 @@
         </p:nvSpPr>
         <p:spPr>
           <a:xfrm>
-            <a:off x="8636508" y="4160520"/>
-            <a:ext cx="747522" cy="164592"/>
+            <a:off x="8577072" y="4279392"/>
+            <a:ext cx="754380" cy="164592"/>
           </a:xfrm>
           <a:prstGeom prst="rect">
             <a:avLst/>
@@ -2027,8 +2027,8 @@
         </p:nvSpPr>
         <p:spPr>
           <a:xfrm>
-            <a:off x="9548622" y="2126986"/>
-            <a:ext cx="674370" cy="1905518"/>
+            <a:off x="9496044" y="2270821"/>
+            <a:ext cx="681228" cy="1880555"/>
           </a:xfrm>
           <a:prstGeom prst="rect">
             <a:avLst/>
@@ -2054,8 +2054,8 @@
         </p:nvSpPr>
         <p:spPr>
           <a:xfrm>
-            <a:off x="9512046" y="4160520"/>
-            <a:ext cx="747522" cy="164592"/>
+            <a:off x="9459468" y="4279392"/>
+            <a:ext cx="754380" cy="164592"/>
           </a:xfrm>
           <a:prstGeom prst="rect">
             <a:avLst/>
@@ -2095,7 +2095,7 @@
         </p:nvSpPr>
         <p:spPr>
           <a:xfrm>
-            <a:off x="6784848" y="4901184"/>
+            <a:off x="6720840" y="5157216"/>
             <a:ext cx="475488" cy="0"/>
           </a:xfrm>
           <a:prstGeom prst="line">
@@ -2120,8 +2120,8 @@
         </p:nvSpPr>
         <p:spPr>
           <a:xfrm>
-            <a:off x="7406640" y="4809744"/>
-            <a:ext cx="3474720" cy="164592"/>
+            <a:off x="7342632" y="5065776"/>
+            <a:ext cx="3429000" cy="164592"/>
           </a:xfrm>
           <a:prstGeom prst="rect">
             <a:avLst/>

--- a/effect-tests/style-candidate-editable-samples/samples/style-sample-minimal-premium.pptx
+++ b/effect-tests/style-candidate-editable-samples/samples/style-sample-minimal-premium.pptx
@@ -1394,22 +1394,16 @@
         <p:spPr>
           <a:xfrm>
             <a:off x="713232" y="4736592"/>
-            <a:ext cx="1353312" cy="621792"/>
-          </a:xfrm>
-          <a:prstGeom prst="roundRect">
-            <a:avLst>
-              <a:gd name="adj" fmla="val 11765"/>
-            </a:avLst>
-          </a:prstGeom>
-          <a:solidFill>
-            <a:srgbClr val="FFFFFF">
-              <a:alpha val="66000"/>
-            </a:srgbClr>
-          </a:solidFill>
-          <a:ln w="12700">
+            <a:ext cx="530352" cy="0"/>
+          </a:xfrm>
+          <a:prstGeom prst="line">
+            <a:avLst/>
+          </a:prstGeom>
+          <a:noFill/>
+          <a:ln w="25400">
             <a:solidFill>
               <a:srgbClr val="050505">
-                <a:alpha val="64000"/>
+                <a:alpha val="78000"/>
               </a:srgbClr>
             </a:solidFill>
             <a:prstDash val="solid"/>
@@ -1424,8 +1418,8 @@
         </p:nvSpPr>
         <p:spPr>
           <a:xfrm>
-            <a:off x="841248" y="4828032"/>
-            <a:ext cx="1097280" cy="286024"/>
+            <a:off x="713232" y="4864608"/>
+            <a:ext cx="1225296" cy="329184"/>
           </a:xfrm>
           <a:prstGeom prst="rect">
             <a:avLst/>
@@ -1465,8 +1459,8 @@
         </p:nvSpPr>
         <p:spPr>
           <a:xfrm>
-            <a:off x="841248" y="5097231"/>
-            <a:ext cx="1097280" cy="161666"/>
+            <a:off x="713232" y="5230368"/>
+            <a:ext cx="1225296" cy="228600"/>
           </a:xfrm>
           <a:prstGeom prst="rect">
             <a:avLst/>
@@ -1484,7 +1478,7 @@
               <a:buNone/>
             </a:pPr>
             <a:r>
-              <a:rPr lang="en-US" sz="760" b="1" dirty="0">
+              <a:rPr lang="en-US" sz="780" b="1" dirty="0">
                 <a:solidFill>
                   <a:srgbClr val="050505"/>
                 </a:solidFill>
@@ -1494,7 +1488,7 @@
               </a:rPr>
               <a:t>企业已进入试点</a:t>
             </a:r>
-            <a:endParaRPr lang="en-US" sz="760" dirty="0"/>
+            <a:endParaRPr lang="en-US" sz="780" dirty="0"/>
           </a:p>
         </p:txBody>
       </p:sp>
@@ -1507,22 +1501,16 @@
         <p:spPr>
           <a:xfrm>
             <a:off x="2395728" y="4736592"/>
-            <a:ext cx="1353312" cy="621792"/>
-          </a:xfrm>
-          <a:prstGeom prst="roundRect">
-            <a:avLst>
-              <a:gd name="adj" fmla="val 11765"/>
-            </a:avLst>
-          </a:prstGeom>
-          <a:solidFill>
-            <a:srgbClr val="FFFFFF">
-              <a:alpha val="66000"/>
-            </a:srgbClr>
-          </a:solidFill>
-          <a:ln w="12700">
+            <a:ext cx="530352" cy="0"/>
+          </a:xfrm>
+          <a:prstGeom prst="line">
+            <a:avLst/>
+          </a:prstGeom>
+          <a:noFill/>
+          <a:ln w="25400">
             <a:solidFill>
               <a:srgbClr val="4A4A4A">
-                <a:alpha val="64000"/>
+                <a:alpha val="78000"/>
               </a:srgbClr>
             </a:solidFill>
             <a:prstDash val="solid"/>
@@ -1537,8 +1525,8 @@
         </p:nvSpPr>
         <p:spPr>
           <a:xfrm>
-            <a:off x="2523744" y="4828032"/>
-            <a:ext cx="1097280" cy="286024"/>
+            <a:off x="2395728" y="4864608"/>
+            <a:ext cx="1225296" cy="329184"/>
           </a:xfrm>
           <a:prstGeom prst="rect">
             <a:avLst/>
@@ -1578,8 +1566,8 @@
         </p:nvSpPr>
         <p:spPr>
           <a:xfrm>
-            <a:off x="2523744" y="5097231"/>
-            <a:ext cx="1097280" cy="161666"/>
+            <a:off x="2395728" y="5230368"/>
+            <a:ext cx="1225296" cy="228600"/>
           </a:xfrm>
           <a:prstGeom prst="rect">
             <a:avLst/>
@@ -1597,7 +1585,7 @@
               <a:buNone/>
             </a:pPr>
             <a:r>
-              <a:rPr lang="en-US" sz="760" b="1" dirty="0">
+              <a:rPr lang="en-US" sz="780" b="1" dirty="0">
                 <a:solidFill>
                   <a:srgbClr val="050505"/>
                 </a:solidFill>
@@ -1607,7 +1595,7 @@
               </a:rPr>
               <a:t>高频任务提效</a:t>
             </a:r>
-            <a:endParaRPr lang="en-US" sz="760" dirty="0"/>
+            <a:endParaRPr lang="en-US" sz="780" dirty="0"/>
           </a:p>
         </p:txBody>
       </p:sp>
@@ -1620,22 +1608,16 @@
         <p:spPr>
           <a:xfrm>
             <a:off x="4078224" y="4736592"/>
-            <a:ext cx="1353312" cy="621792"/>
-          </a:xfrm>
-          <a:prstGeom prst="roundRect">
-            <a:avLst>
-              <a:gd name="adj" fmla="val 11765"/>
-            </a:avLst>
-          </a:prstGeom>
-          <a:solidFill>
-            <a:srgbClr val="FFFFFF">
-              <a:alpha val="66000"/>
-            </a:srgbClr>
-          </a:solidFill>
-          <a:ln w="12700">
+            <a:ext cx="530352" cy="0"/>
+          </a:xfrm>
+          <a:prstGeom prst="line">
+            <a:avLst/>
+          </a:prstGeom>
+          <a:noFill/>
+          <a:ln w="25400">
             <a:solidFill>
               <a:srgbClr val="050505">
-                <a:alpha val="64000"/>
+                <a:alpha val="78000"/>
               </a:srgbClr>
             </a:solidFill>
             <a:prstDash val="solid"/>
@@ -1650,8 +1632,8 @@
         </p:nvSpPr>
         <p:spPr>
           <a:xfrm>
-            <a:off x="4206240" y="4828032"/>
-            <a:ext cx="1097280" cy="286024"/>
+            <a:off x="4078224" y="4864608"/>
+            <a:ext cx="1225296" cy="329184"/>
           </a:xfrm>
           <a:prstGeom prst="rect">
             <a:avLst/>
@@ -1691,8 +1673,8 @@
         </p:nvSpPr>
         <p:spPr>
           <a:xfrm>
-            <a:off x="4206240" y="5097231"/>
-            <a:ext cx="1097280" cy="161666"/>
+            <a:off x="4078224" y="5230368"/>
+            <a:ext cx="1225296" cy="228600"/>
           </a:xfrm>
           <a:prstGeom prst="rect">
             <a:avLst/>
@@ -1710,7 +1692,7 @@
               <a:buNone/>
             </a:pPr>
             <a:r>
-              <a:rPr lang="en-US" sz="760" b="1" dirty="0">
+              <a:rPr lang="en-US" sz="780" b="1" dirty="0">
                 <a:solidFill>
                   <a:srgbClr val="050505"/>
                 </a:solidFill>
@@ -1720,7 +1702,7 @@
               </a:rPr>
               <a:t>规模化落地窗口</a:t>
             </a:r>
-            <a:endParaRPr lang="en-US" sz="760" dirty="0"/>
+            <a:endParaRPr lang="en-US" sz="780" dirty="0"/>
           </a:p>
         </p:txBody>
       </p:sp>
